--- a/media/resources/files/Ekvivalenettuuluk_BOP_iREETTOO_SandykBashKatyrma_uNtV4CP.pptx
+++ b/media/resources/files/Ekvivalenettuuluk_BOP_iREETTOO_SandykBashKatyrma_uNtV4CP.pptx
@@ -2092,7 +2092,7 @@
                 <a:ea typeface="+mn-ea"/>
                 <a:cs typeface="+mn-cs"/>
               </a:rPr>
-              <a:t>Турдуу пикирлер учун ыраазычылык билдиребиз.</a:t>
+              <a:t>Түрдүү пикирлер үчүн ыраазычылык билдиребиз.</a:t>
             </a:r>
           </a:p>
           <a:p>

--- a/media/resources/files/Ekvivalenettuuluk_BOP_iREETTOO_SandykBashKatyrma_uNtV4CP.pptx
+++ b/media/resources/files/Ekvivalenettuuluk_BOP_iREETTOO_SandykBashKatyrma_uNtV4CP.pptx
@@ -1112,7 +1112,7 @@
                 <a:ea typeface="+mn-ea"/>
                 <a:cs typeface="+mn-cs"/>
               </a:rPr>
-              <a:t>Бөлчөктөрдү, ондуктарды жана пайыздарды иретт</a:t>
+              <a:t>Бөлчөктөрдү, ондуктарды жана пайыздарды ирээтт</a:t>
             </a:r>
           </a:p>
           <a:p>
@@ -8473,7 +8473,7 @@
             <a:pPr algn="ctr"/>
             <a:r>
               <a:rPr lang="ru-RU" sz="1200" dirty="0"/>
-              <a:t>2 бөлчөк, ондук жана пайыздан турган бул иреттелген</a:t>
+              <a:t>2 бөлчөк, ондук жана пайыздан турган бул ирээттелген</a:t>
             </a:r>
             <a:endParaRPr lang="en-US" sz="1200" dirty="0"/>
           </a:p>
@@ -15967,7 +15967,7 @@
             <a:pPr algn="ctr"/>
             <a:r>
               <a:rPr lang="ru-RU" sz="1200" dirty="0"/>
-              <a:t>иреттелген тизмени канча жол менен толтура аласыз?</a:t>
+              <a:t>ирээттелген тизмени канча жол менен толтура аласыз?</a:t>
             </a:r>
             <a:endParaRPr lang="en-GB" sz="1200" dirty="0"/>
           </a:p>
@@ -16527,7 +16527,7 @@
             <a:pPr algn="ctr"/>
             <a:r>
               <a:rPr lang="ru-RU" sz="1200" dirty="0"/>
-              <a:t>2 бөлчөк, ондук жана пайыздан турган бул иреттелген</a:t>
+              <a:t>2 бөлчөк, ондук жана пайыздан турган бул ирээттелген</a:t>
             </a:r>
             <a:endParaRPr lang="en-US" sz="1200" dirty="0"/>
           </a:p>
@@ -22837,7 +22837,7 @@
             <a:pPr algn="ctr"/>
             <a:r>
               <a:rPr lang="ru-RU" sz="1200" dirty="0"/>
-              <a:t>2 бөлчөк, ондук жана пайыздан турган бул иреттелген</a:t>
+              <a:t>2 бөлчөк, ондук жана пайыздан турган бул ирээттелген</a:t>
             </a:r>
             <a:endParaRPr lang="en-US" sz="1200" dirty="0"/>
           </a:p>
@@ -22882,7 +22882,7 @@
             <a:pPr algn="ctr"/>
             <a:r>
               <a:rPr lang="ru-RU" sz="1200" dirty="0"/>
-              <a:t>2 бөлчөк, ондук жана пайыздан турган бул иреттелген</a:t>
+              <a:t>2 бөлчөк, ондук жана пайыздан турган бул ирээттелген</a:t>
             </a:r>
             <a:endParaRPr lang="en-US" sz="1200" dirty="0"/>
           </a:p>
@@ -22927,7 +22927,7 @@
             <a:pPr algn="ctr"/>
             <a:r>
               <a:rPr lang="ru-RU" sz="1200" dirty="0"/>
-              <a:t>2 бөлчөк, ондук жана пайыздан турган бул иреттелген</a:t>
+              <a:t>2 бөлчөк, ондук жана пайыздан турган бул ирээттелген</a:t>
             </a:r>
             <a:endParaRPr lang="en-US" sz="1200" dirty="0"/>
           </a:p>
@@ -23249,7 +23249,7 @@
             <a:pPr algn="ctr"/>
             <a:r>
               <a:rPr lang="ru-RU" sz="1200" dirty="0"/>
-              <a:t>иреттелген тизмени канча жол менен толтура аласыз?</a:t>
+              <a:t>ирээттелген тизмени канча жол менен толтура аласыз?</a:t>
             </a:r>
             <a:endParaRPr lang="en-GB" sz="1200" dirty="0"/>
           </a:p>
@@ -30719,7 +30719,7 @@
             <a:pPr algn="ctr"/>
             <a:r>
               <a:rPr lang="ru-RU" sz="1200" dirty="0"/>
-              <a:t>иреттелген тизмени канча жол менен толтура аласыз?</a:t>
+              <a:t>ирээттелген тизмени канча жол менен толтура аласыз?</a:t>
             </a:r>
             <a:endParaRPr lang="en-GB" sz="1200" dirty="0"/>
           </a:p>
@@ -30764,7 +30764,7 @@
             <a:pPr algn="ctr"/>
             <a:r>
               <a:rPr lang="ru-RU" sz="1200" dirty="0"/>
-              <a:t>иреттелген тизмени канча жол менен толтура аласыз?</a:t>
+              <a:t>ирээттелген тизмени канча жол менен толтура аласыз?</a:t>
             </a:r>
             <a:endParaRPr lang="en-GB" sz="1200" dirty="0"/>
           </a:p>
@@ -30809,7 +30809,7 @@
             <a:pPr algn="ctr"/>
             <a:r>
               <a:rPr lang="ru-RU" sz="1200" dirty="0"/>
-              <a:t>иреттелген тизмени канча жол менен толтура аласыз?</a:t>
+              <a:t>ирээттелген тизмени канча жол менен толтура аласыз?</a:t>
             </a:r>
             <a:endParaRPr lang="en-GB" sz="1200" dirty="0"/>
           </a:p>
